--- a/presentations/b15-inhouse-automation-executive/B15_InHouse_Automation_Executive_Narrated.pptx
+++ b/presentations/b15-inhouse-automation-executive/B15_InHouse_Automation_Executive_Narrated.pptx
@@ -187,7 +187,7 @@
     </p:spTree>
     <p:extLst>
       <p:ext uri="{BB962C8B-B14F-4D97-AF65-F5344CB8AC3E}">
-        <p14:creationId xmlns:p14="http://schemas.microsoft.com/office/powerpoint/2010/main" val="4093954436"/>
+        <p14:creationId xmlns:p14="http://schemas.microsoft.com/office/powerpoint/2010/main" val="1247611665"/>
       </p:ext>
     </p:extLst>
   </p:cSld>
@@ -2297,7 +2297,7 @@
             <a:hlinkClick r:id="" action="ppaction://media"/>
             <a:extLst>
               <a:ext uri="{FF2B5EF4-FFF2-40B4-BE49-F238E27FC236}">
-                <a16:creationId xmlns:a16="http://schemas.microsoft.com/office/drawing/2014/main" id="{9A713617-06D0-A81B-6115-EC35840EC30B}"/>
+                <a16:creationId xmlns:a16="http://schemas.microsoft.com/office/drawing/2014/main" id="{6CCCFB55-7A2F-A842-6A88-ECAC5390A059}"/>
               </a:ext>
             </a:extLst>
           </p:cNvPr>
@@ -2313,7 +2313,7 @@
                     <p:ext uri="{3AFAAA56-56D3-431D-BCD4-E75A35582382}">
                       <p173:tracksInfo xmlns:p173="http://schemas.microsoft.com/office/powerpoint/2017/3/main" displayLoc="slide">
                         <p173:trackLst>
-                          <p173:track id="{8DEB6EF0-61E5-4EA4-85C7-E751C0D36C98}" label="English (captions)" lang="en-US" r:embed="rId6"/>
+                          <p173:track id="{D21A5696-4E93-43D0-901B-DC70AD91E17E}" label="English (captions)" lang="en-US" r:embed="rId6"/>
                         </p173:trackLst>
                       </p173:tracksInfo>
                     </p:ext>
@@ -2331,7 +2331,7 @@
         </p:blipFill>
         <p:spPr>
           <a:xfrm>
-            <a:off x="127000" y="6350000"/>
+            <a:off x="12446000" y="127000"/>
             <a:ext cx="304800" cy="304800"/>
           </a:xfrm>
           <a:prstGeom prst="rect">
@@ -3682,7 +3682,7 @@
             <a:hlinkClick r:id="" action="ppaction://media"/>
             <a:extLst>
               <a:ext uri="{FF2B5EF4-FFF2-40B4-BE49-F238E27FC236}">
-                <a16:creationId xmlns:a16="http://schemas.microsoft.com/office/drawing/2014/main" id="{8A9E97B1-B6F6-CA49-178A-5D004AF10EFD}"/>
+                <a16:creationId xmlns:a16="http://schemas.microsoft.com/office/drawing/2014/main" id="{13B2391F-3211-0EDB-2C57-73E01ED08031}"/>
               </a:ext>
             </a:extLst>
           </p:cNvPr>
@@ -3698,7 +3698,7 @@
                     <p:ext uri="{3AFAAA56-56D3-431D-BCD4-E75A35582382}">
                       <p173:tracksInfo xmlns:p173="http://schemas.microsoft.com/office/powerpoint/2017/3/main" displayLoc="slide">
                         <p173:trackLst>
-                          <p173:track id="{773FBD55-FE64-4BF1-B5DD-1CFC0D8FC586}" label="English (captions)" lang="en-US" r:embed="rId6"/>
+                          <p173:track id="{2BC4CB71-79C6-4C8D-A4BE-816E895D5A1A}" label="English (captions)" lang="en-US" r:embed="rId6"/>
                         </p173:trackLst>
                       </p173:tracksInfo>
                     </p:ext>
@@ -3716,7 +3716,7 @@
         </p:blipFill>
         <p:spPr>
           <a:xfrm>
-            <a:off x="127000" y="6350000"/>
+            <a:off x="12446000" y="127000"/>
             <a:ext cx="304800" cy="304800"/>
           </a:xfrm>
           <a:prstGeom prst="rect">
@@ -4661,7 +4661,7 @@
             <a:hlinkClick r:id="" action="ppaction://media"/>
             <a:extLst>
               <a:ext uri="{FF2B5EF4-FFF2-40B4-BE49-F238E27FC236}">
-                <a16:creationId xmlns:a16="http://schemas.microsoft.com/office/drawing/2014/main" id="{0C5D0DFC-E70D-6EF0-4BDF-D1A4EE565004}"/>
+                <a16:creationId xmlns:a16="http://schemas.microsoft.com/office/drawing/2014/main" id="{546123C0-4EBD-6BAD-0133-458244707D59}"/>
               </a:ext>
             </a:extLst>
           </p:cNvPr>
@@ -4677,7 +4677,7 @@
                     <p:ext uri="{3AFAAA56-56D3-431D-BCD4-E75A35582382}">
                       <p173:tracksInfo xmlns:p173="http://schemas.microsoft.com/office/powerpoint/2017/3/main" displayLoc="slide">
                         <p173:trackLst>
-                          <p173:track id="{E5130667-0AAC-48A7-AA6F-701D13586B19}" label="English (captions)" lang="en-US" r:embed="rId7"/>
+                          <p173:track id="{5A990AF5-9DC6-4E48-AD66-610E80D865A2}" label="English (captions)" lang="en-US" r:embed="rId7"/>
                         </p173:trackLst>
                       </p173:tracksInfo>
                     </p:ext>
@@ -4695,7 +4695,7 @@
         </p:blipFill>
         <p:spPr>
           <a:xfrm>
-            <a:off x="127000" y="6350000"/>
+            <a:off x="12446000" y="127000"/>
             <a:ext cx="304800" cy="304800"/>
           </a:xfrm>
           <a:prstGeom prst="rect">
@@ -6048,7 +6048,7 @@
             <a:hlinkClick r:id="" action="ppaction://media"/>
             <a:extLst>
               <a:ext uri="{FF2B5EF4-FFF2-40B4-BE49-F238E27FC236}">
-                <a16:creationId xmlns:a16="http://schemas.microsoft.com/office/drawing/2014/main" id="{C192C7D1-1673-6193-16E1-AF9CD3E6A26E}"/>
+                <a16:creationId xmlns:a16="http://schemas.microsoft.com/office/drawing/2014/main" id="{494433E8-A69A-2DD7-17A6-071C5A28A142}"/>
               </a:ext>
             </a:extLst>
           </p:cNvPr>
@@ -6064,7 +6064,7 @@
                     <p:ext uri="{3AFAAA56-56D3-431D-BCD4-E75A35582382}">
                       <p173:tracksInfo xmlns:p173="http://schemas.microsoft.com/office/powerpoint/2017/3/main" displayLoc="slide">
                         <p173:trackLst>
-                          <p173:track id="{FDD3B3C0-F219-4ACA-B54F-F645A19742E9}" label="English (captions)" lang="en-US" r:embed="rId7"/>
+                          <p173:track id="{EF93F187-F154-413D-A8FD-DB1741307DD2}" label="English (captions)" lang="en-US" r:embed="rId7"/>
                         </p173:trackLst>
                       </p173:tracksInfo>
                     </p:ext>
@@ -6082,7 +6082,7 @@
         </p:blipFill>
         <p:spPr>
           <a:xfrm>
-            <a:off x="127000" y="6350000"/>
+            <a:off x="12446000" y="127000"/>
             <a:ext cx="304800" cy="304800"/>
           </a:xfrm>
           <a:prstGeom prst="rect">
@@ -6909,7 +6909,7 @@
             <a:hlinkClick r:id="" action="ppaction://media"/>
             <a:extLst>
               <a:ext uri="{FF2B5EF4-FFF2-40B4-BE49-F238E27FC236}">
-                <a16:creationId xmlns:a16="http://schemas.microsoft.com/office/drawing/2014/main" id="{56258BD5-F3C8-DFEE-FE98-361DAC3A086B}"/>
+                <a16:creationId xmlns:a16="http://schemas.microsoft.com/office/drawing/2014/main" id="{F4769375-C07C-3915-052B-502D48A50FE0}"/>
               </a:ext>
             </a:extLst>
           </p:cNvPr>
@@ -6925,7 +6925,7 @@
                     <p:ext uri="{3AFAAA56-56D3-431D-BCD4-E75A35582382}">
                       <p173:tracksInfo xmlns:p173="http://schemas.microsoft.com/office/powerpoint/2017/3/main" displayLoc="slide">
                         <p173:trackLst>
-                          <p173:track id="{5619F9FF-3E1B-4399-BBBD-F27518D06878}" label="English (captions)" lang="en-US" r:embed="rId7"/>
+                          <p173:track id="{959AD0D4-934B-4D70-8D70-854F44CC26B2}" label="English (captions)" lang="en-US" r:embed="rId7"/>
                         </p173:trackLst>
                       </p173:tracksInfo>
                     </p:ext>
@@ -6943,7 +6943,7 @@
         </p:blipFill>
         <p:spPr>
           <a:xfrm>
-            <a:off x="127000" y="6350000"/>
+            <a:off x="12446000" y="127000"/>
             <a:ext cx="304800" cy="304800"/>
           </a:xfrm>
           <a:prstGeom prst="rect">
@@ -8500,7 +8500,7 @@
             <a:hlinkClick r:id="" action="ppaction://media"/>
             <a:extLst>
               <a:ext uri="{FF2B5EF4-FFF2-40B4-BE49-F238E27FC236}">
-                <a16:creationId xmlns:a16="http://schemas.microsoft.com/office/drawing/2014/main" id="{3119B79E-E493-7C8D-9FE2-F83924435B48}"/>
+                <a16:creationId xmlns:a16="http://schemas.microsoft.com/office/drawing/2014/main" id="{DCB6E382-7649-CCC1-07F1-56C97167D6F8}"/>
               </a:ext>
             </a:extLst>
           </p:cNvPr>
@@ -8516,7 +8516,7 @@
                     <p:ext uri="{3AFAAA56-56D3-431D-BCD4-E75A35582382}">
                       <p173:tracksInfo xmlns:p173="http://schemas.microsoft.com/office/powerpoint/2017/3/main" displayLoc="slide">
                         <p173:trackLst>
-                          <p173:track id="{7B005DE0-9D25-437C-9876-ED9E9F1F6450}" label="English (captions)" lang="en-US" r:embed="rId7"/>
+                          <p173:track id="{2CD6386E-2B8E-4510-B488-C331ECD8554B}" label="English (captions)" lang="en-US" r:embed="rId7"/>
                         </p173:trackLst>
                       </p173:tracksInfo>
                     </p:ext>
@@ -8534,7 +8534,7 @@
         </p:blipFill>
         <p:spPr>
           <a:xfrm>
-            <a:off x="127000" y="6350000"/>
+            <a:off x="12446000" y="127000"/>
             <a:ext cx="304800" cy="304800"/>
           </a:xfrm>
           <a:prstGeom prst="rect">
@@ -9397,7 +9397,7 @@
             <a:hlinkClick r:id="" action="ppaction://media"/>
             <a:extLst>
               <a:ext uri="{FF2B5EF4-FFF2-40B4-BE49-F238E27FC236}">
-                <a16:creationId xmlns:a16="http://schemas.microsoft.com/office/drawing/2014/main" id="{2283C428-3C07-ACB1-8E0C-1871D0277417}"/>
+                <a16:creationId xmlns:a16="http://schemas.microsoft.com/office/drawing/2014/main" id="{54932620-70B2-932D-83F8-05A205F810F2}"/>
               </a:ext>
             </a:extLst>
           </p:cNvPr>
@@ -9413,7 +9413,7 @@
                     <p:ext uri="{3AFAAA56-56D3-431D-BCD4-E75A35582382}">
                       <p173:tracksInfo xmlns:p173="http://schemas.microsoft.com/office/powerpoint/2017/3/main" displayLoc="slide">
                         <p173:trackLst>
-                          <p173:track id="{7DCD7451-EB4A-4ED5-95D7-E6277655851B}" label="English (captions)" lang="en-US" r:embed="rId7"/>
+                          <p173:track id="{FAE8A9E4-B222-4463-81E5-663E614A0C5C}" label="English (captions)" lang="en-US" r:embed="rId7"/>
                         </p173:trackLst>
                       </p173:tracksInfo>
                     </p:ext>
@@ -9431,7 +9431,7 @@
         </p:blipFill>
         <p:spPr>
           <a:xfrm>
-            <a:off x="127000" y="6350000"/>
+            <a:off x="12446000" y="127000"/>
             <a:ext cx="304800" cy="304800"/>
           </a:xfrm>
           <a:prstGeom prst="rect">
@@ -11476,7 +11476,7 @@
             <a:hlinkClick r:id="" action="ppaction://media"/>
             <a:extLst>
               <a:ext uri="{FF2B5EF4-FFF2-40B4-BE49-F238E27FC236}">
-                <a16:creationId xmlns:a16="http://schemas.microsoft.com/office/drawing/2014/main" id="{9B0F8CA1-1E3A-548E-70E8-84B23F60D268}"/>
+                <a16:creationId xmlns:a16="http://schemas.microsoft.com/office/drawing/2014/main" id="{7EEE5C2E-F4DC-1CE9-89B1-A9909C41817D}"/>
               </a:ext>
             </a:extLst>
           </p:cNvPr>
@@ -11492,7 +11492,7 @@
                     <p:ext uri="{3AFAAA56-56D3-431D-BCD4-E75A35582382}">
                       <p173:tracksInfo xmlns:p173="http://schemas.microsoft.com/office/powerpoint/2017/3/main" displayLoc="slide">
                         <p173:trackLst>
-                          <p173:track id="{E5C6DB5F-471E-4CE3-967F-9D219348EB6E}" label="English (captions)" lang="en-US" r:embed="rId6"/>
+                          <p173:track id="{9C756592-2972-48CC-AD08-DFE3AF1822A8}" label="English (captions)" lang="en-US" r:embed="rId6"/>
                         </p173:trackLst>
                       </p173:tracksInfo>
                     </p:ext>
@@ -11510,7 +11510,7 @@
         </p:blipFill>
         <p:spPr>
           <a:xfrm>
-            <a:off x="127000" y="6350000"/>
+            <a:off x="12446000" y="127000"/>
             <a:ext cx="304800" cy="304800"/>
           </a:xfrm>
           <a:prstGeom prst="rect">
@@ -12643,7 +12643,7 @@
             <a:hlinkClick r:id="" action="ppaction://media"/>
             <a:extLst>
               <a:ext uri="{FF2B5EF4-FFF2-40B4-BE49-F238E27FC236}">
-                <a16:creationId xmlns:a16="http://schemas.microsoft.com/office/drawing/2014/main" id="{BD4B227A-9C29-BFED-F519-326AA2F35627}"/>
+                <a16:creationId xmlns:a16="http://schemas.microsoft.com/office/drawing/2014/main" id="{5FB2AD53-E999-F2B4-16D6-D4AFE43E72C7}"/>
               </a:ext>
             </a:extLst>
           </p:cNvPr>
@@ -12659,7 +12659,7 @@
                     <p:ext uri="{3AFAAA56-56D3-431D-BCD4-E75A35582382}">
                       <p173:tracksInfo xmlns:p173="http://schemas.microsoft.com/office/powerpoint/2017/3/main" displayLoc="slide">
                         <p173:trackLst>
-                          <p173:track id="{22FE5D82-1E8B-488E-BAF0-06D9DB63A0ED}" label="English (captions)" lang="en-US" r:embed="rId7"/>
+                          <p173:track id="{D20F34BB-30ED-4F3B-B694-46BB92CA63BE}" label="English (captions)" lang="en-US" r:embed="rId7"/>
                         </p173:trackLst>
                       </p173:tracksInfo>
                     </p:ext>
@@ -12677,7 +12677,7 @@
         </p:blipFill>
         <p:spPr>
           <a:xfrm>
-            <a:off x="127000" y="6350000"/>
+            <a:off x="12446000" y="127000"/>
             <a:ext cx="304800" cy="304800"/>
           </a:xfrm>
           <a:prstGeom prst="rect">
@@ -14722,7 +14722,7 @@
             <a:hlinkClick r:id="" action="ppaction://media"/>
             <a:extLst>
               <a:ext uri="{FF2B5EF4-FFF2-40B4-BE49-F238E27FC236}">
-                <a16:creationId xmlns:a16="http://schemas.microsoft.com/office/drawing/2014/main" id="{C4FFC194-7296-C0DC-70C2-EA7A21359B9D}"/>
+                <a16:creationId xmlns:a16="http://schemas.microsoft.com/office/drawing/2014/main" id="{D67A4F26-A4C7-E5B3-4E33-85BC284565CB}"/>
               </a:ext>
             </a:extLst>
           </p:cNvPr>
@@ -14738,7 +14738,7 @@
                     <p:ext uri="{3AFAAA56-56D3-431D-BCD4-E75A35582382}">
                       <p173:tracksInfo xmlns:p173="http://schemas.microsoft.com/office/powerpoint/2017/3/main" displayLoc="slide">
                         <p173:trackLst>
-                          <p173:track id="{6A8B0B13-74D3-414E-869C-F711F4B481D3}" label="English (captions)" lang="en-US" r:embed="rId6"/>
+                          <p173:track id="{6B736862-17B4-493A-9E82-6883129DEE18}" label="English (captions)" lang="en-US" r:embed="rId6"/>
                         </p173:trackLst>
                       </p173:tracksInfo>
                     </p:ext>
@@ -14756,7 +14756,7 @@
         </p:blipFill>
         <p:spPr>
           <a:xfrm>
-            <a:off x="127000" y="6350000"/>
+            <a:off x="12446000" y="127000"/>
             <a:ext cx="304800" cy="304800"/>
           </a:xfrm>
           <a:prstGeom prst="rect">
@@ -16735,7 +16735,7 @@
             <a:hlinkClick r:id="" action="ppaction://media"/>
             <a:extLst>
               <a:ext uri="{FF2B5EF4-FFF2-40B4-BE49-F238E27FC236}">
-                <a16:creationId xmlns:a16="http://schemas.microsoft.com/office/drawing/2014/main" id="{23457B2F-571A-14DC-C279-6429D663A6BC}"/>
+                <a16:creationId xmlns:a16="http://schemas.microsoft.com/office/drawing/2014/main" id="{F5300767-D853-E993-B55C-C3B22CE23212}"/>
               </a:ext>
             </a:extLst>
           </p:cNvPr>
@@ -16751,7 +16751,7 @@
                     <p:ext uri="{3AFAAA56-56D3-431D-BCD4-E75A35582382}">
                       <p173:tracksInfo xmlns:p173="http://schemas.microsoft.com/office/powerpoint/2017/3/main" displayLoc="slide">
                         <p173:trackLst>
-                          <p173:track id="{EE05FBF4-538F-48D1-9637-2822018058B0}" label="English (captions)" lang="en-US" r:embed="rId7"/>
+                          <p173:track id="{5CE014D8-0341-47BF-B62B-07911D51A119}" label="English (captions)" lang="en-US" r:embed="rId7"/>
                         </p173:trackLst>
                       </p173:tracksInfo>
                     </p:ext>
@@ -16769,7 +16769,7 @@
         </p:blipFill>
         <p:spPr>
           <a:xfrm>
-            <a:off x="127000" y="6350000"/>
+            <a:off x="12446000" y="127000"/>
             <a:ext cx="304800" cy="304800"/>
           </a:xfrm>
           <a:prstGeom prst="rect">
@@ -18537,7 +18537,7 @@
             <a:hlinkClick r:id="" action="ppaction://media"/>
             <a:extLst>
               <a:ext uri="{FF2B5EF4-FFF2-40B4-BE49-F238E27FC236}">
-                <a16:creationId xmlns:a16="http://schemas.microsoft.com/office/drawing/2014/main" id="{407B396C-A80C-1025-B5BA-BE5A7A243367}"/>
+                <a16:creationId xmlns:a16="http://schemas.microsoft.com/office/drawing/2014/main" id="{29244E02-C24B-4771-F20A-E45DD3844B4B}"/>
               </a:ext>
             </a:extLst>
           </p:cNvPr>
@@ -18553,7 +18553,7 @@
                     <p:ext uri="{3AFAAA56-56D3-431D-BCD4-E75A35582382}">
                       <p173:tracksInfo xmlns:p173="http://schemas.microsoft.com/office/powerpoint/2017/3/main" displayLoc="slide">
                         <p173:trackLst>
-                          <p173:track id="{2D0D55A8-97C3-4C6C-936E-2F42A35ED5A5}" label="English (captions)" lang="en-US" r:embed="rId7"/>
+                          <p173:track id="{F27491C6-59FA-4A9D-809A-D772FAE10B4B}" label="English (captions)" lang="en-US" r:embed="rId7"/>
                         </p173:trackLst>
                       </p173:tracksInfo>
                     </p:ext>
@@ -18571,7 +18571,7 @@
         </p:blipFill>
         <p:spPr>
           <a:xfrm>
-            <a:off x="127000" y="6350000"/>
+            <a:off x="12446000" y="127000"/>
             <a:ext cx="304800" cy="304800"/>
           </a:xfrm>
           <a:prstGeom prst="rect">
